--- a/assets/pptx/catalog-130.pptx
+++ b/assets/pptx/catalog-130.pptx
@@ -3423,7 +3423,7 @@
                 <a:ea typeface="Ebrima"/>
                 <a:cs typeface="Ebrima"/>
               </a:rPr>
-              <a:t>ልስበከው እየሱሴን (2)</a:t>
+              <a:t>ልስበከው እየሱሴን 2</a:t>
             </a:r>
           </a:p>
         </p:txBody>
@@ -3490,7 +3490,7 @@
                 <a:ea typeface="Ebrima"/>
                 <a:cs typeface="Ebrima"/>
               </a:rPr>
-              <a:t>ልስበከው እየሱሴን (2)</a:t>
+              <a:t>ልስበከው እየሱሴን 2</a:t>
             </a:r>
           </a:p>
         </p:txBody>
@@ -3575,7 +3575,7 @@
                 <a:ea typeface="Ebrima"/>
                 <a:cs typeface="Ebrima"/>
               </a:rPr>
-              <a:t>እወጣለሁ መሰክራለሁ (2)</a:t>
+              <a:t>እወጣለሁ መሰክራለሁ 2</a:t>
             </a:r>
           </a:p>
           <a:p>
@@ -3593,7 +3593,7 @@
                 <a:ea typeface="Ebrima"/>
                 <a:cs typeface="Ebrima"/>
               </a:rPr>
-              <a:t>እየሱስ ያድናል እላለሁ (4)</a:t>
+              <a:t>እየሱስ ያድናል እላለሁ 4</a:t>
             </a:r>
           </a:p>
         </p:txBody>
@@ -3678,7 +3678,7 @@
                 <a:ea typeface="Ebrima"/>
                 <a:cs typeface="Ebrima"/>
               </a:rPr>
-              <a:t>ወደ ኣብ መግቢያ በሩ እርሱ ነው (2)</a:t>
+              <a:t>ወደ ኣብ መግቢያ በሩ እርሱ ነው 2</a:t>
             </a:r>
           </a:p>
           <a:p>
@@ -3714,7 +3714,7 @@
                 <a:ea typeface="Ebrima"/>
                 <a:cs typeface="Ebrima"/>
               </a:rPr>
-              <a:t>መዳን በጌታ በእየሱስ ነው (2)</a:t>
+              <a:t>መዳን በጌታ በእየሱስ ነው 2</a:t>
             </a:r>
           </a:p>
         </p:txBody>
@@ -3835,7 +3835,7 @@
                 <a:ea typeface="Ebrima"/>
                 <a:cs typeface="Ebrima"/>
               </a:rPr>
-              <a:t>ልስበከው እየሱሴን (2)</a:t>
+              <a:t>ልስበከው እየሱሴን 2</a:t>
             </a:r>
           </a:p>
           <a:p>
@@ -3853,7 +3853,7 @@
                 <a:ea typeface="Ebrima"/>
                 <a:cs typeface="Ebrima"/>
               </a:rPr>
-              <a:t>ልስበከው እየሱሴን (2)</a:t>
+              <a:t>ልስበከው እየሱሴን 2</a:t>
             </a:r>
           </a:p>
         </p:txBody>
@@ -3938,7 +3938,7 @@
                 <a:ea typeface="Ebrima"/>
                 <a:cs typeface="Ebrima"/>
               </a:rPr>
-              <a:t>እወጣለሁ መሰክራለሁ (2)</a:t>
+              <a:t>እወጣለሁ መሰክራለሁ 2</a:t>
             </a:r>
           </a:p>
           <a:p>
@@ -3956,7 +3956,7 @@
                 <a:ea typeface="Ebrima"/>
                 <a:cs typeface="Ebrima"/>
               </a:rPr>
-              <a:t>እየሱስ ያድናል እላለሁ (4)</a:t>
+              <a:t>እየሱስ ያድናል እላለሁ 4</a:t>
             </a:r>
           </a:p>
         </p:txBody>
@@ -4041,7 +4041,7 @@
                 <a:ea typeface="Ebrima"/>
                 <a:cs typeface="Ebrima"/>
               </a:rPr>
-              <a:t>ወደ ኣብ መግቢያ በሩ እርሱ ነው (2)</a:t>
+              <a:t>ወደ ኣብ መግቢያ በሩ እርሱ ነው 2</a:t>
             </a:r>
           </a:p>
           <a:p>
@@ -4077,7 +4077,7 @@
                 <a:ea typeface="Ebrima"/>
                 <a:cs typeface="Ebrima"/>
               </a:rPr>
-              <a:t>መዳን በጌታ በእየሱስ ነው (2)</a:t>
+              <a:t>መዳን በጌታ በእየሱስ ነው 2</a:t>
             </a:r>
           </a:p>
         </p:txBody>
